--- a/out/kit-frame.pptx
+++ b/out/kit-frame.pptx
@@ -4,6 +4,9 @@
   <p:sldMasterIdLst>
     <p:sldMasterId id="2147483648" r:id="rId1"/>
   </p:sldMasterIdLst>
+  <p:notesMasterIdLst>
+    <p:notesMasterId r:id="rId14"/>
+  </p:notesMasterIdLst>
   <p:sldIdLst>
     <p:sldId id="256" r:id="rId2"/>
     <p:sldId id="257" r:id="rId3"/>
@@ -18,9 +21,6 @@
     <p:sldId id="266" r:id="rId12"/>
     <p:sldId id="267" r:id="rId13"/>
   </p:sldIdLst>
-  <p:notesMasterIdLst>
-    <p:notesMasterId r:id="rId14"/>
-  </p:notesMasterIdLst>
   <p:sldSz cx="12192000" cy="6858000"/>
   <p:notesSz cx="6858000" cy="12192000"/>
   <p:defaultTextStyle>
@@ -2160,7 +2160,7 @@
             <a:prstDash val="solid"/>
           </a:ln>
           <a:effectLst>
-            <a:outerShdw blurRad="88900" dist="25400" dir="5400000" sx="100000" sy="100000" algn="ctr" rotWithShape="0">
+            <a:outerShdw blurRad="84836" dist="24257" dir="5400000" sx="100000" sy="100000" algn="ctr" rotWithShape="0">
               <a:srgbClr val="000000">
                 <a:alpha val="24000"/>
               </a:srgbClr>
@@ -3768,7 +3768,7 @@
             <a:prstDash val="solid"/>
           </a:ln>
           <a:effectLst>
-            <a:outerShdw blurRad="88900" dist="25400" dir="5400000" sx="100000" sy="100000" algn="ctr" rotWithShape="0">
+            <a:outerShdw blurRad="76835" dist="21971" dir="5400000" sx="100000" sy="100000" algn="ctr" rotWithShape="0">
               <a:srgbClr val="000000">
                 <a:alpha val="24000"/>
               </a:srgbClr>
@@ -5485,9 +5485,9 @@
           </a:solidFill>
           <a:ln/>
           <a:effectLst>
-            <a:outerShdw blurRad="203200" dist="25400" dir="5400000" sx="102000" sy="102000" algn="ctr" rotWithShape="0">
+            <a:outerShdw blurRad="85344" dist="15240" dir="5400000" sx="100840" sy="100840" algn="ctr" rotWithShape="0">
               <a:srgbClr val="000000">
-                <a:alpha val="32000"/>
+                <a:alpha val="28000"/>
               </a:srgbClr>
             </a:outerShdw>
           </a:effectLst>
@@ -5607,9 +5607,9 @@
             </a:solidFill>
             <a:ln/>
             <a:effectLst>
-              <a:outerShdw blurRad="203200" dist="25400" dir="5400000" sx="102000" sy="102000" algn="ctr" rotWithShape="0">
+              <a:outerShdw blurRad="85344" dist="15240" dir="5400000" sx="100840" sy="100840" algn="ctr" rotWithShape="0">
                 <a:srgbClr val="000000">
-                  <a:alpha val="32000"/>
+                  <a:alpha val="28000"/>
                 </a:srgbClr>
               </a:outerShdw>
             </a:effectLst>
@@ -7179,9 +7179,6 @@
               </a:rPr>
               <a:t>框架鑑</a:t>
             </a:r>
-            <a:pPr algn="l" indent="0" marL="0">
-              <a:buNone/>
-            </a:pPr>
             <a:r>
               <a:rPr lang="en-US" sz="900" dirty="0">
                 <a:solidFill>
@@ -8688,9 +8685,6 @@
               </a:rPr>
               <a:t>框架鑑</a:t>
             </a:r>
-            <a:pPr algn="l" indent="0" marL="0">
-              <a:buNone/>
-            </a:pPr>
             <a:r>
               <a:rPr lang="en-US" sz="900" dirty="0">
                 <a:solidFill>
@@ -10593,9 +10587,6 @@
               </a:rPr>
               <a:t>組織</a:t>
             </a:r>
-            <a:pPr algn="ctr" indent="0" marL="0">
-              <a:buNone/>
-            </a:pPr>
             <a:r>
               <a:rPr lang="en-US" sz="1100" dirty="0">
                 <a:solidFill>
@@ -11119,9 +11110,6 @@
               </a:rPr>
               <a:t>框架鑑</a:t>
             </a:r>
-            <a:pPr algn="l" indent="0" marL="0">
-              <a:buNone/>
-            </a:pPr>
             <a:r>
               <a:rPr lang="en-US" sz="900" dirty="0">
                 <a:solidFill>
@@ -14311,9 +14299,6 @@
               </a:rPr>
               <a:t>框架鑑</a:t>
             </a:r>
-            <a:pPr algn="l" indent="0" marL="0">
-              <a:buNone/>
-            </a:pPr>
             <a:r>
               <a:rPr lang="en-US" sz="900" dirty="0">
                 <a:solidFill>
@@ -14566,9 +14551,6 @@
               </a:rPr>
               <a:t>三步驟流程</a:t>
             </a:r>
-            <a:pPr algn="l" indent="0" marL="0">
-              <a:buNone/>
-            </a:pPr>
             <a:r>
               <a:rPr lang="en-US" sz="800" dirty="0">
                 <a:solidFill>
@@ -14984,9 +14966,6 @@
               </a:rPr>
               <a:t>判斷分岔（是／否）</a:t>
             </a:r>
-            <a:pPr algn="l" indent="0" marL="0">
-              <a:buNone/>
-            </a:pPr>
             <a:r>
               <a:rPr lang="en-US" sz="800" dirty="0">
                 <a:solidFill>
@@ -15423,9 +15402,6 @@
               </a:rPr>
               <a:t>例外退回路徑</a:t>
             </a:r>
-            <a:pPr algn="l" indent="0" marL="0">
-              <a:buNone/>
-            </a:pPr>
             <a:r>
               <a:rPr lang="en-US" sz="800" dirty="0">
                 <a:solidFill>
@@ -15804,9 +15780,6 @@
               </a:rPr>
               <a:t>審核迴圈</a:t>
             </a:r>
-            <a:pPr algn="l" indent="0" marL="0">
-              <a:buNone/>
-            </a:pPr>
             <a:r>
               <a:rPr lang="en-US" sz="800" dirty="0">
                 <a:solidFill>
@@ -16222,9 +16195,6 @@
               </a:rPr>
               <a:t>泳道（雙道）</a:t>
             </a:r>
-            <a:pPr algn="l" indent="0" marL="0">
-              <a:buNone/>
-            </a:pPr>
             <a:r>
               <a:rPr lang="en-US" sz="800" dirty="0">
                 <a:solidFill>
@@ -16781,9 +16751,6 @@
               </a:rPr>
               <a:t>平行分流／合流</a:t>
             </a:r>
-            <a:pPr algn="l" indent="0" marL="0">
-              <a:buNone/>
-            </a:pPr>
             <a:r>
               <a:rPr lang="en-US" sz="800" dirty="0">
                 <a:solidFill>
@@ -17276,9 +17243,6 @@
               </a:rPr>
               <a:t>輸入→處理→輸出</a:t>
             </a:r>
-            <a:pPr algn="l" indent="0" marL="0">
-              <a:buNone/>
-            </a:pPr>
             <a:r>
               <a:rPr lang="en-US" sz="800" dirty="0">
                 <a:solidFill>
@@ -17703,9 +17667,6 @@
               </a:rPr>
               <a:t>前後對照</a:t>
             </a:r>
-            <a:pPr algn="l" indent="0" marL="0">
-              <a:buNone/>
-            </a:pPr>
             <a:r>
               <a:rPr lang="en-US" sz="800" dirty="0">
                 <a:solidFill>
@@ -17832,9 +17793,6 @@
                 </a:rPr>
                 <a:t>現況 </a:t>
               </a:r>
-              <a:pPr algn="l" indent="0" marL="0">
-                <a:buNone/>
-              </a:pPr>
               <a:r>
                 <a:rPr lang="en-US" sz="800" dirty="0">
                   <a:solidFill>
@@ -18039,9 +17997,6 @@
                 </a:rPr>
                 <a:t>改善後 </a:t>
               </a:r>
-              <a:pPr algn="l" indent="0" marL="0">
-                <a:buNone/>
-              </a:pPr>
               <a:r>
                 <a:rPr lang="en-US" sz="800" dirty="0">
                   <a:solidFill>
@@ -18155,9 +18110,6 @@
               </a:rPr>
               <a:t>框架鑑</a:t>
             </a:r>
-            <a:pPr algn="l" indent="0" marL="0">
-              <a:buNone/>
-            </a:pPr>
             <a:r>
               <a:rPr lang="en-US" sz="900" dirty="0">
                 <a:solidFill>
@@ -19314,9 +19266,6 @@
               </a:rPr>
               <a:t>大標題文字</a:t>
             </a:r>
-            <a:pPr algn="l" indent="0" marL="0">
-              <a:buNone/>
-            </a:pPr>
             <a:r>
               <a:rPr lang="en-US" sz="1000" dirty="0">
                 <a:solidFill>
@@ -19367,9 +19316,6 @@
               </a:rPr>
               <a:t>副標題・細字主色</a:t>
             </a:r>
-            <a:pPr algn="l" indent="0" marL="0">
-              <a:buNone/>
-            </a:pPr>
             <a:r>
               <a:rPr lang="en-US" sz="1000" dirty="0">
                 <a:solidFill>
@@ -19420,9 +19366,6 @@
               </a:rPr>
               <a:t>標籤與卡片標題</a:t>
             </a:r>
-            <a:pPr algn="l" indent="0" marL="0">
-              <a:buNone/>
-            </a:pPr>
             <a:r>
               <a:rPr lang="en-US" sz="1000" dirty="0">
                 <a:solidFill>
@@ -19473,9 +19416,6 @@
               </a:rPr>
               <a:t>內文說明文字，灰色、行距寬鬆</a:t>
             </a:r>
-            <a:pPr algn="l" indent="0" marL="0">
-              <a:buNone/>
-            </a:pPr>
             <a:r>
               <a:rPr lang="en-US" sz="1000" dirty="0">
                 <a:solidFill>
@@ -21174,9 +21114,6 @@
               </a:rPr>
               <a:t>框架鑑</a:t>
             </a:r>
-            <a:pPr algn="l" indent="0" marL="0">
-              <a:buNone/>
-            </a:pPr>
             <a:r>
               <a:rPr lang="en-US" sz="900" dirty="0">
                 <a:solidFill>
@@ -21468,9 +21405,6 @@
               </a:rPr>
               <a:t>標題＋內文</a:t>
             </a:r>
-            <a:pPr algn="l" indent="0" marL="0">
-              <a:buNone/>
-            </a:pPr>
             <a:r>
               <a:rPr lang="en-US" sz="1000" b="1" dirty="0">
                 <a:solidFill>
@@ -22611,9 +22545,6 @@
               </a:rPr>
               <a:t>框架鑑</a:t>
             </a:r>
-            <a:pPr algn="l" indent="0" marL="0">
-              <a:buNone/>
-            </a:pPr>
             <a:r>
               <a:rPr lang="en-US" sz="900" dirty="0">
                 <a:solidFill>
@@ -24511,9 +24442,6 @@
               </a:rPr>
               <a:t>框架鑑</a:t>
             </a:r>
-            <a:pPr algn="l" indent="0" marL="0">
-              <a:buNone/>
-            </a:pPr>
             <a:r>
               <a:rPr lang="en-US" sz="900" dirty="0">
                 <a:solidFill>
@@ -26414,9 +26342,6 @@
               </a:rPr>
               <a:t>框架鑑</a:t>
             </a:r>
-            <a:pPr algn="l" indent="0" marL="0">
-              <a:buNone/>
-            </a:pPr>
             <a:r>
               <a:rPr lang="en-US" sz="900" dirty="0">
                 <a:solidFill>
@@ -28613,9 +28538,6 @@
               </a:rPr>
               <a:t>框架鑑</a:t>
             </a:r>
-            <a:pPr algn="l" indent="0" marL="0">
-              <a:buNone/>
-            </a:pPr>
             <a:r>
               <a:rPr lang="en-US" sz="900" dirty="0">
                 <a:solidFill>
@@ -30230,9 +30152,6 @@
               </a:rPr>
               <a:t>框架鑑</a:t>
             </a:r>
-            <a:pPr algn="l" indent="0" marL="0">
-              <a:buNone/>
-            </a:pPr>
             <a:r>
               <a:rPr lang="en-US" sz="900" dirty="0">
                 <a:solidFill>
@@ -32334,9 +32253,6 @@
               </a:rPr>
               <a:t>框架鑑</a:t>
             </a:r>
-            <a:pPr algn="l" indent="0" marL="0">
-              <a:buNone/>
-            </a:pPr>
             <a:r>
               <a:rPr lang="en-US" sz="900" dirty="0">
                 <a:solidFill>
